--- a/20260930AI与通信融合研究进展调研二.pptx
+++ b/20260930AI与通信融合研究进展调研二.pptx
@@ -22,7 +22,7 @@
     <p:sldId id="276" r:id="rId15"/>
     <p:sldId id="266" r:id="rId16"/>
     <p:sldId id="267" r:id="rId17"/>
-    <p:sldId id="269" r:id="rId18"/>
+    <p:sldId id="277" r:id="rId18"/>
   </p:sldIdLst>
   <p:sldSz cx="12192000" cy="6858000"/>
   <p:notesSz cx="6858000" cy="9144000"/>
@@ -129,7 +129,7 @@
             <a:srgbClr val="A4A3A4"/>
           </p15:clr>
         </p15:guide>
-        <p15:guide id="2" pos="3849" userDrawn="1">
+        <p15:guide id="2" pos="3860" userDrawn="1">
           <p15:clr>
             <a:srgbClr val="A4A3A4"/>
           </p15:clr>
@@ -1065,7 +1065,7 @@
   <p:cSld>
     <p:spTree>
       <p:nvGrpSpPr>
-        <p:cNvPr id="38" name=""/>
+        <p:cNvPr id="1" name=""/>
         <p:cNvGrpSpPr/>
         <p:nvPr/>
       </p:nvGrpSpPr>
@@ -1079,35 +1079,58 @@
       </p:grpSpPr>
       <p:sp>
         <p:nvSpPr>
-          <p:cNvPr id="39" name="幻灯片图像占位符 1"/>
+          <p:cNvPr id="2" name="幻灯片图像占位符 1"/>
+          <p:cNvSpPr>
+            <a:spLocks noGrp="1" noRot="1" noChangeAspect="1"/>
+          </p:cNvSpPr>
+          <p:nvPr>
+            <p:ph type="sldImg"/>
+          </p:nvPr>
+        </p:nvSpPr>
+        <p:spPr/>
+      </p:sp>
+      <p:sp>
+        <p:nvSpPr>
+          <p:cNvPr id="3" name="备注占位符 2"/>
           <p:cNvSpPr>
             <a:spLocks noGrp="1"/>
           </p:cNvSpPr>
           <p:nvPr>
-            <p:ph type="sldImg" idx="2"/>
+            <p:ph type="body" idx="1"/>
           </p:nvPr>
         </p:nvSpPr>
         <p:spPr/>
         <p:txBody>
           <a:bodyPr/>
-          <a:p/>
+          <a:lstStyle/>
+          <a:p>
+            <a:r>
+              <a:rPr lang="zh-CN" altLang="en-US" dirty="0"/>
+              <a:t>以上是全部汇报内容，感谢各位老师批评指正，谢谢大家！</a:t>
+            </a:r>
+            <a:endParaRPr lang="zh-CN" altLang="en-US" dirty="0"/>
+          </a:p>
         </p:txBody>
       </p:sp>
       <p:sp>
         <p:nvSpPr>
-          <p:cNvPr id="40" name="文本占位符 2"/>
+          <p:cNvPr id="4" name="灯片编号占位符 3"/>
           <p:cNvSpPr>
             <a:spLocks noGrp="1"/>
           </p:cNvSpPr>
           <p:nvPr>
-            <p:ph type="body" idx="3"/>
+            <p:ph type="sldNum" sz="quarter" idx="5"/>
           </p:nvPr>
         </p:nvSpPr>
         <p:spPr/>
         <p:txBody>
           <a:bodyPr/>
-          <a:p>
-            <a:endParaRPr lang="zh-CN" altLang="en-US"/>
+          <a:lstStyle/>
+          <a:p>
+            <a:fld id="{6E17C6E9-B76F-4EEB-BC0B-74787FB92CC7}" type="slidenum">
+              <a:rPr lang="en-US" smtClean="0"/>
+            </a:fld>
+            <a:endParaRPr lang="en-US"/>
           </a:p>
         </p:txBody>
       </p:sp>
@@ -10499,6 +10522,575 @@
 </p:sldLayout>
 </file>
 
+<file path=ppt/slideLayouts/slideLayout15.xml><?xml version="1.0" encoding="utf-8"?>
+<p:sldLayout xmlns:a="http://schemas.openxmlformats.org/drawingml/2006/main" xmlns:r="http://schemas.openxmlformats.org/officeDocument/2006/relationships" xmlns:p="http://schemas.openxmlformats.org/presentationml/2006/main" preserve="1" userDrawn="1">
+  <p:cSld name="标题页2">
+    <p:spTree>
+      <p:nvGrpSpPr>
+        <p:cNvPr id="1" name=""/>
+        <p:cNvGrpSpPr/>
+        <p:nvPr/>
+      </p:nvGrpSpPr>
+      <p:grpSpPr>
+        <a:xfrm>
+          <a:off x="0" y="0"/>
+          <a:ext cx="0" cy="0"/>
+          <a:chOff x="0" y="0"/>
+          <a:chExt cx="0" cy="0"/>
+        </a:xfrm>
+      </p:grpSpPr>
+      <p:sp>
+        <p:nvSpPr>
+          <p:cNvPr id="7" name="矩形 6"/>
+          <p:cNvSpPr/>
+          <p:nvPr userDrawn="1"/>
+        </p:nvSpPr>
+        <p:spPr>
+          <a:xfrm>
+            <a:off x="383647" y="508498"/>
+            <a:ext cx="144000" cy="144000"/>
+          </a:xfrm>
+          <a:prstGeom prst="rect">
+            <a:avLst/>
+          </a:prstGeom>
+          <a:solidFill>
+            <a:srgbClr val="FFFFFF"/>
+          </a:solidFill>
+          <a:ln w="12700" cap="flat" cmpd="sng" algn="ctr">
+            <a:solidFill>
+              <a:srgbClr val="005BAC"/>
+            </a:solidFill>
+            <a:prstDash val="solid"/>
+            <a:miter lim="800000"/>
+          </a:ln>
+          <a:effectLst/>
+        </p:spPr>
+        <p:txBody>
+          <a:bodyPr rtlCol="0" anchor="ctr"/>
+          <a:lstStyle/>
+          <a:p>
+            <a:pPr marL="0" marR="0" lvl="0" indent="0" algn="ctr" defTabSz="914400" eaLnBrk="1" fontAlgn="auto" latinLnBrk="0" hangingPunct="1">
+              <a:lnSpc>
+                <a:spcPct val="100000"/>
+              </a:lnSpc>
+              <a:spcBef>
+                <a:spcPts val="0"/>
+              </a:spcBef>
+              <a:spcAft>
+                <a:spcPts val="0"/>
+              </a:spcAft>
+              <a:buClrTx/>
+              <a:buSzTx/>
+              <a:buFontTx/>
+              <a:buNone/>
+              <a:defRPr/>
+            </a:pPr>
+            <a:endParaRPr kumimoji="0" lang="zh-CN" altLang="en-US" sz="1800" b="0" i="0" u="none" strike="noStrike" kern="0" cap="none" spc="0" normalizeH="0" baseline="0" noProof="0">
+              <a:ln>
+                <a:noFill/>
+              </a:ln>
+              <a:solidFill>
+                <a:srgbClr val="FFFFFF"/>
+              </a:solidFill>
+              <a:effectLst/>
+              <a:uLnTx/>
+              <a:uFillTx/>
+              <a:latin typeface="微软雅黑" panose="020B0503020204020204" charset="-122"/>
+              <a:ea typeface="微软雅黑" panose="020B0503020204020204" charset="-122"/>
+              <a:cs typeface="+mn-cs"/>
+            </a:endParaRPr>
+          </a:p>
+        </p:txBody>
+      </p:sp>
+      <p:sp>
+        <p:nvSpPr>
+          <p:cNvPr id="8" name="矩形 7"/>
+          <p:cNvSpPr/>
+          <p:nvPr userDrawn="1"/>
+        </p:nvSpPr>
+        <p:spPr>
+          <a:xfrm flipH="1">
+            <a:off x="11664353" y="508498"/>
+            <a:ext cx="144000" cy="144000"/>
+          </a:xfrm>
+          <a:prstGeom prst="rect">
+            <a:avLst/>
+          </a:prstGeom>
+          <a:solidFill>
+            <a:srgbClr val="FFFFFF"/>
+          </a:solidFill>
+          <a:ln w="12700" cap="flat" cmpd="sng" algn="ctr">
+            <a:solidFill>
+              <a:srgbClr val="005BAC"/>
+            </a:solidFill>
+            <a:prstDash val="solid"/>
+            <a:miter lim="800000"/>
+          </a:ln>
+          <a:effectLst/>
+        </p:spPr>
+        <p:txBody>
+          <a:bodyPr rtlCol="0" anchor="ctr"/>
+          <a:lstStyle/>
+          <a:p>
+            <a:pPr marL="0" marR="0" lvl="0" indent="0" algn="ctr" defTabSz="914400" eaLnBrk="1" fontAlgn="auto" latinLnBrk="0" hangingPunct="1">
+              <a:lnSpc>
+                <a:spcPct val="100000"/>
+              </a:lnSpc>
+              <a:spcBef>
+                <a:spcPts val="0"/>
+              </a:spcBef>
+              <a:spcAft>
+                <a:spcPts val="0"/>
+              </a:spcAft>
+              <a:buClrTx/>
+              <a:buSzTx/>
+              <a:buFontTx/>
+              <a:buNone/>
+              <a:defRPr/>
+            </a:pPr>
+            <a:endParaRPr kumimoji="0" lang="zh-CN" altLang="en-US" sz="1800" b="0" i="0" u="none" strike="noStrike" kern="0" cap="none" spc="0" normalizeH="0" baseline="0" noProof="0">
+              <a:ln>
+                <a:noFill/>
+              </a:ln>
+              <a:solidFill>
+                <a:srgbClr val="FFFFFF"/>
+              </a:solidFill>
+              <a:effectLst/>
+              <a:uLnTx/>
+              <a:uFillTx/>
+              <a:latin typeface="微软雅黑" panose="020B0503020204020204" charset="-122"/>
+              <a:ea typeface="微软雅黑" panose="020B0503020204020204" charset="-122"/>
+              <a:cs typeface="+mn-cs"/>
+            </a:endParaRPr>
+          </a:p>
+        </p:txBody>
+      </p:sp>
+      <p:sp>
+        <p:nvSpPr>
+          <p:cNvPr id="9" name="矩形 8"/>
+          <p:cNvSpPr/>
+          <p:nvPr userDrawn="1"/>
+        </p:nvSpPr>
+        <p:spPr>
+          <a:xfrm>
+            <a:off x="191344" y="305562"/>
+            <a:ext cx="288000" cy="288000"/>
+          </a:xfrm>
+          <a:prstGeom prst="rect">
+            <a:avLst/>
+          </a:prstGeom>
+          <a:solidFill>
+            <a:srgbClr val="005BAC"/>
+          </a:solidFill>
+          <a:ln w="12700" cap="flat" cmpd="sng" algn="ctr">
+            <a:solidFill>
+              <a:srgbClr val="005BAC"/>
+            </a:solidFill>
+            <a:prstDash val="solid"/>
+            <a:miter lim="800000"/>
+          </a:ln>
+          <a:effectLst/>
+        </p:spPr>
+        <p:txBody>
+          <a:bodyPr rtlCol="0" anchor="ctr"/>
+          <a:lstStyle/>
+          <a:p>
+            <a:pPr marL="0" marR="0" lvl="0" indent="0" algn="ctr" defTabSz="914400" eaLnBrk="1" fontAlgn="auto" latinLnBrk="0" hangingPunct="1">
+              <a:lnSpc>
+                <a:spcPct val="100000"/>
+              </a:lnSpc>
+              <a:spcBef>
+                <a:spcPts val="0"/>
+              </a:spcBef>
+              <a:spcAft>
+                <a:spcPts val="0"/>
+              </a:spcAft>
+              <a:buClrTx/>
+              <a:buSzTx/>
+              <a:buFontTx/>
+              <a:buNone/>
+              <a:defRPr/>
+            </a:pPr>
+            <a:endParaRPr kumimoji="0" lang="zh-CN" altLang="en-US" sz="1800" b="0" i="0" u="none" strike="noStrike" kern="0" cap="none" spc="0" normalizeH="0" baseline="0" noProof="0">
+              <a:ln>
+                <a:noFill/>
+              </a:ln>
+              <a:solidFill>
+                <a:srgbClr val="FFFFFF"/>
+              </a:solidFill>
+              <a:effectLst/>
+              <a:uLnTx/>
+              <a:uFillTx/>
+              <a:latin typeface="微软雅黑" panose="020B0503020204020204" charset="-122"/>
+              <a:ea typeface="微软雅黑" panose="020B0503020204020204" charset="-122"/>
+              <a:cs typeface="+mn-cs"/>
+            </a:endParaRPr>
+          </a:p>
+        </p:txBody>
+      </p:sp>
+      <p:sp>
+        <p:nvSpPr>
+          <p:cNvPr id="10" name="矩形 9"/>
+          <p:cNvSpPr/>
+          <p:nvPr userDrawn="1"/>
+        </p:nvSpPr>
+        <p:spPr>
+          <a:xfrm flipH="1">
+            <a:off x="11712656" y="305562"/>
+            <a:ext cx="288000" cy="288000"/>
+          </a:xfrm>
+          <a:prstGeom prst="rect">
+            <a:avLst/>
+          </a:prstGeom>
+          <a:solidFill>
+            <a:srgbClr val="005BAC"/>
+          </a:solidFill>
+          <a:ln w="12700" cap="flat" cmpd="sng" algn="ctr">
+            <a:solidFill>
+              <a:srgbClr val="005BAC"/>
+            </a:solidFill>
+            <a:prstDash val="solid"/>
+            <a:miter lim="800000"/>
+          </a:ln>
+          <a:effectLst/>
+        </p:spPr>
+        <p:txBody>
+          <a:bodyPr rtlCol="0" anchor="ctr"/>
+          <a:lstStyle/>
+          <a:p>
+            <a:pPr marL="0" marR="0" lvl="0" indent="0" algn="ctr" defTabSz="914400" eaLnBrk="1" fontAlgn="auto" latinLnBrk="0" hangingPunct="1">
+              <a:lnSpc>
+                <a:spcPct val="100000"/>
+              </a:lnSpc>
+              <a:spcBef>
+                <a:spcPts val="0"/>
+              </a:spcBef>
+              <a:spcAft>
+                <a:spcPts val="0"/>
+              </a:spcAft>
+              <a:buClrTx/>
+              <a:buSzTx/>
+              <a:buFontTx/>
+              <a:buNone/>
+              <a:defRPr/>
+            </a:pPr>
+            <a:endParaRPr kumimoji="0" lang="zh-CN" altLang="en-US" sz="1800" b="0" i="0" u="none" strike="noStrike" kern="0" cap="none" spc="0" normalizeH="0" baseline="0" noProof="0">
+              <a:ln>
+                <a:noFill/>
+              </a:ln>
+              <a:solidFill>
+                <a:srgbClr val="FFFFFF"/>
+              </a:solidFill>
+              <a:effectLst/>
+              <a:uLnTx/>
+              <a:uFillTx/>
+              <a:latin typeface="微软雅黑" panose="020B0503020204020204" charset="-122"/>
+              <a:ea typeface="微软雅黑" panose="020B0503020204020204" charset="-122"/>
+              <a:cs typeface="+mn-cs"/>
+            </a:endParaRPr>
+          </a:p>
+        </p:txBody>
+      </p:sp>
+      <p:cxnSp>
+        <p:nvCxnSpPr>
+          <p:cNvPr id="11" name="直接连接符 23"/>
+          <p:cNvCxnSpPr>
+            <a:stCxn id="7" idx="2"/>
+            <a:endCxn id="8" idx="2"/>
+          </p:cNvCxnSpPr>
+          <p:nvPr userDrawn="1"/>
+        </p:nvCxnSpPr>
+        <p:spPr>
+          <a:xfrm>
+            <a:off x="455647" y="652498"/>
+            <a:ext cx="11280706" cy="0"/>
+          </a:xfrm>
+          <a:prstGeom prst="line">
+            <a:avLst/>
+          </a:prstGeom>
+          <a:noFill/>
+          <a:ln w="6350" cap="flat" cmpd="sng" algn="ctr">
+            <a:solidFill>
+              <a:srgbClr val="005BAD"/>
+            </a:solidFill>
+            <a:prstDash val="solid"/>
+            <a:miter lim="800000"/>
+          </a:ln>
+          <a:effectLst/>
+        </p:spPr>
+      </p:cxnSp>
+      <p:pic>
+        <p:nvPicPr>
+          <p:cNvPr id="12" name="图片 11"/>
+          <p:cNvPicPr>
+            <a:picLocks noChangeAspect="1"/>
+          </p:cNvPicPr>
+          <p:nvPr userDrawn="1"/>
+        </p:nvPicPr>
+        <p:blipFill>
+          <a:blip r:embed="rId2" cstate="print">
+            <a:extLst>
+              <a:ext uri="{28A0092B-C50C-407E-A947-70E740481C1C}">
+                <a14:useLocalDpi xmlns:a14="http://schemas.microsoft.com/office/drawing/2010/main" val="0"/>
+              </a:ext>
+            </a:extLst>
+          </a:blip>
+          <a:stretch>
+            <a:fillRect/>
+          </a:stretch>
+        </p:blipFill>
+        <p:spPr>
+          <a:xfrm>
+            <a:off x="5170125" y="4941168"/>
+            <a:ext cx="1851750" cy="1409075"/>
+          </a:xfrm>
+          <a:prstGeom prst="rect">
+            <a:avLst/>
+          </a:prstGeom>
+        </p:spPr>
+      </p:pic>
+      <p:sp>
+        <p:nvSpPr>
+          <p:cNvPr id="13" name="页脚占位符 136"/>
+          <p:cNvSpPr txBox="1"/>
+          <p:nvPr userDrawn="1"/>
+        </p:nvSpPr>
+        <p:spPr>
+          <a:xfrm>
+            <a:off x="3287688" y="284390"/>
+            <a:ext cx="5616624" cy="364987"/>
+          </a:xfrm>
+          <a:prstGeom prst="rect">
+            <a:avLst/>
+          </a:prstGeom>
+        </p:spPr>
+        <p:txBody>
+          <a:bodyPr vert="horz" lIns="91440" tIns="45720" rIns="91440" bIns="45720" rtlCol="0" anchor="ctr"/>
+          <a:lstStyle>
+            <a:defPPr>
+              <a:defRPr lang="zh-CN"/>
+            </a:defPPr>
+            <a:lvl1pPr marL="0" algn="dist" defTabSz="914400" rtl="0" eaLnBrk="1" latinLnBrk="0" hangingPunct="1">
+              <a:defRPr sz="1000" kern="1200">
+                <a:solidFill>
+                  <a:schemeClr val="tx2"/>
+                </a:solidFill>
+                <a:latin typeface="+mn-lt"/>
+                <a:ea typeface="+mn-ea"/>
+                <a:cs typeface="+mn-cs"/>
+              </a:defRPr>
+            </a:lvl1pPr>
+            <a:lvl2pPr marL="457200" algn="l" defTabSz="914400" rtl="0" eaLnBrk="1" latinLnBrk="0" hangingPunct="1">
+              <a:defRPr sz="1800" kern="1200">
+                <a:solidFill>
+                  <a:schemeClr val="tx1"/>
+                </a:solidFill>
+                <a:latin typeface="+mn-lt"/>
+                <a:ea typeface="+mn-ea"/>
+                <a:cs typeface="+mn-cs"/>
+              </a:defRPr>
+            </a:lvl2pPr>
+            <a:lvl3pPr marL="914400" algn="l" defTabSz="914400" rtl="0" eaLnBrk="1" latinLnBrk="0" hangingPunct="1">
+              <a:defRPr sz="1800" kern="1200">
+                <a:solidFill>
+                  <a:schemeClr val="tx1"/>
+                </a:solidFill>
+                <a:latin typeface="+mn-lt"/>
+                <a:ea typeface="+mn-ea"/>
+                <a:cs typeface="+mn-cs"/>
+              </a:defRPr>
+            </a:lvl3pPr>
+            <a:lvl4pPr marL="1371600" algn="l" defTabSz="914400" rtl="0" eaLnBrk="1" latinLnBrk="0" hangingPunct="1">
+              <a:defRPr sz="1800" kern="1200">
+                <a:solidFill>
+                  <a:schemeClr val="tx1"/>
+                </a:solidFill>
+                <a:latin typeface="+mn-lt"/>
+                <a:ea typeface="+mn-ea"/>
+                <a:cs typeface="+mn-cs"/>
+              </a:defRPr>
+            </a:lvl4pPr>
+            <a:lvl5pPr marL="1828800" algn="l" defTabSz="914400" rtl="0" eaLnBrk="1" latinLnBrk="0" hangingPunct="1">
+              <a:defRPr sz="1800" kern="1200">
+                <a:solidFill>
+                  <a:schemeClr val="tx1"/>
+                </a:solidFill>
+                <a:latin typeface="+mn-lt"/>
+                <a:ea typeface="+mn-ea"/>
+                <a:cs typeface="+mn-cs"/>
+              </a:defRPr>
+            </a:lvl5pPr>
+            <a:lvl6pPr marL="2286000" algn="l" defTabSz="914400" rtl="0" eaLnBrk="1" latinLnBrk="0" hangingPunct="1">
+              <a:defRPr sz="1800" kern="1200">
+                <a:solidFill>
+                  <a:schemeClr val="tx1"/>
+                </a:solidFill>
+                <a:latin typeface="+mn-lt"/>
+                <a:ea typeface="+mn-ea"/>
+                <a:cs typeface="+mn-cs"/>
+              </a:defRPr>
+            </a:lvl6pPr>
+            <a:lvl7pPr marL="2743200" algn="l" defTabSz="914400" rtl="0" eaLnBrk="1" latinLnBrk="0" hangingPunct="1">
+              <a:defRPr sz="1800" kern="1200">
+                <a:solidFill>
+                  <a:schemeClr val="tx1"/>
+                </a:solidFill>
+                <a:latin typeface="+mn-lt"/>
+                <a:ea typeface="+mn-ea"/>
+                <a:cs typeface="+mn-cs"/>
+              </a:defRPr>
+            </a:lvl7pPr>
+            <a:lvl8pPr marL="3200400" algn="l" defTabSz="914400" rtl="0" eaLnBrk="1" latinLnBrk="0" hangingPunct="1">
+              <a:defRPr sz="1800" kern="1200">
+                <a:solidFill>
+                  <a:schemeClr val="tx1"/>
+                </a:solidFill>
+                <a:latin typeface="+mn-lt"/>
+                <a:ea typeface="+mn-ea"/>
+                <a:cs typeface="+mn-cs"/>
+              </a:defRPr>
+            </a:lvl8pPr>
+            <a:lvl9pPr marL="3657600" algn="l" defTabSz="914400" rtl="0" eaLnBrk="1" latinLnBrk="0" hangingPunct="1">
+              <a:defRPr sz="1800" kern="1200">
+                <a:solidFill>
+                  <a:schemeClr val="tx1"/>
+                </a:solidFill>
+                <a:latin typeface="+mn-lt"/>
+                <a:ea typeface="+mn-ea"/>
+                <a:cs typeface="+mn-cs"/>
+              </a:defRPr>
+            </a:lvl9pPr>
+          </a:lstStyle>
+          <a:p>
+            <a:r>
+              <a:rPr lang="zh-CN" altLang="en-US" sz="1400" kern="1200" dirty="0">
+                <a:solidFill>
+                  <a:srgbClr val="005BAC"/>
+                </a:solidFill>
+                <a:latin typeface="微软雅黑" panose="020B0503020204020204" charset="-122"/>
+                <a:ea typeface="微软雅黑" panose="020B0503020204020204" charset="-122"/>
+                <a:cs typeface="+mn-cs"/>
+              </a:rPr>
+              <a:t>明德厚学 求是创新</a:t>
+            </a:r>
+            <a:endParaRPr lang="zh-CN" altLang="en-US" sz="1400" kern="1200" dirty="0">
+              <a:solidFill>
+                <a:srgbClr val="005BAC"/>
+              </a:solidFill>
+              <a:latin typeface="微软雅黑" panose="020B0503020204020204" charset="-122"/>
+              <a:ea typeface="微软雅黑" panose="020B0503020204020204" charset="-122"/>
+              <a:cs typeface="+mn-cs"/>
+            </a:endParaRPr>
+          </a:p>
+        </p:txBody>
+      </p:sp>
+      <p:sp>
+        <p:nvSpPr>
+          <p:cNvPr id="16" name="矩形 15"/>
+          <p:cNvSpPr/>
+          <p:nvPr userDrawn="1"/>
+        </p:nvSpPr>
+        <p:spPr>
+          <a:xfrm>
+            <a:off x="191344" y="1556795"/>
+            <a:ext cx="11809312" cy="2808310"/>
+          </a:xfrm>
+          <a:prstGeom prst="rect">
+            <a:avLst/>
+          </a:prstGeom>
+          <a:solidFill>
+            <a:srgbClr val="005BAC"/>
+          </a:solidFill>
+          <a:ln w="12700" cap="flat" cmpd="sng" algn="ctr">
+            <a:noFill/>
+            <a:prstDash val="solid"/>
+            <a:miter lim="800000"/>
+          </a:ln>
+          <a:effectLst/>
+        </p:spPr>
+        <p:txBody>
+          <a:bodyPr rtlCol="0" anchor="ctr"/>
+          <a:lstStyle/>
+          <a:p>
+            <a:pPr marL="0" marR="0" lvl="0" indent="0" algn="ctr" defTabSz="914400" eaLnBrk="1" fontAlgn="auto" latinLnBrk="0" hangingPunct="1">
+              <a:lnSpc>
+                <a:spcPct val="100000"/>
+              </a:lnSpc>
+              <a:spcBef>
+                <a:spcPts val="0"/>
+              </a:spcBef>
+              <a:spcAft>
+                <a:spcPts val="0"/>
+              </a:spcAft>
+              <a:buClrTx/>
+              <a:buSzTx/>
+              <a:buFontTx/>
+              <a:buNone/>
+              <a:defRPr/>
+            </a:pPr>
+            <a:endParaRPr kumimoji="0" lang="zh-CN" altLang="en-US" sz="1800" b="0" i="0" u="none" strike="noStrike" kern="0" cap="none" spc="0" normalizeH="0" baseline="0" noProof="0">
+              <a:ln>
+                <a:noFill/>
+              </a:ln>
+              <a:solidFill>
+                <a:srgbClr val="FFFFFF"/>
+              </a:solidFill>
+              <a:effectLst/>
+              <a:uLnTx/>
+              <a:uFillTx/>
+              <a:latin typeface="微软雅黑" panose="020B0503020204020204" charset="-122"/>
+              <a:ea typeface="微软雅黑" panose="020B0503020204020204" charset="-122"/>
+              <a:cs typeface="+mn-cs"/>
+            </a:endParaRPr>
+          </a:p>
+        </p:txBody>
+      </p:sp>
+      <p:sp>
+        <p:nvSpPr>
+          <p:cNvPr id="17" name="标题 75"/>
+          <p:cNvSpPr>
+            <a:spLocks noGrp="1"/>
+          </p:cNvSpPr>
+          <p:nvPr>
+            <p:ph type="title" hasCustomPrompt="1"/>
+          </p:nvPr>
+        </p:nvSpPr>
+        <p:spPr>
+          <a:xfrm>
+            <a:off x="1524000" y="2492895"/>
+            <a:ext cx="9144000" cy="958227"/>
+          </a:xfrm>
+        </p:spPr>
+        <p:txBody>
+          <a:bodyPr/>
+          <a:lstStyle>
+            <a:lvl1pPr algn="ctr">
+              <a:defRPr sz="4400" b="1">
+                <a:solidFill>
+                  <a:schemeClr val="bg1"/>
+                </a:solidFill>
+                <a:latin typeface="微软雅黑 Light" panose="020B0502040204020203" pitchFamily="34" charset="-122"/>
+                <a:ea typeface="微软雅黑 Light" panose="020B0502040204020203" pitchFamily="34" charset="-122"/>
+              </a:defRPr>
+            </a:lvl1pPr>
+          </a:lstStyle>
+          <a:p>
+            <a:r>
+              <a:rPr kumimoji="1" lang="zh-CN" altLang="en-US" dirty="0"/>
+              <a:t>编辑标题样式</a:t>
+            </a:r>
+            <a:endParaRPr kumimoji="1" lang="zh-CN" altLang="en-US" dirty="0"/>
+          </a:p>
+        </p:txBody>
+      </p:sp>
+    </p:spTree>
+  </p:cSld>
+  <p:clrMapOvr>
+    <a:masterClrMapping/>
+  </p:clrMapOvr>
+</p:sldLayout>
+</file>
+
 <file path=ppt/slideLayouts/slideLayout2.xml><?xml version="1.0" encoding="utf-8"?>
 <p:sldLayout xmlns:a="http://schemas.openxmlformats.org/drawingml/2006/main" xmlns:r="http://schemas.openxmlformats.org/officeDocument/2006/relationships" xmlns:p="http://schemas.openxmlformats.org/presentationml/2006/main" type="obj" preserve="1">
   <p:cSld name="标题和内容">
@@ -12318,7 +12910,7 @@
           <p:nvPr>
             <p:ph type="title"/>
             <p:custDataLst>
-              <p:tags r:id="rId15"/>
+              <p:tags r:id="rId16"/>
             </p:custDataLst>
           </p:nvPr>
         </p:nvSpPr>
@@ -12354,7 +12946,7 @@
           <p:nvPr>
             <p:ph type="body" idx="1"/>
             <p:custDataLst>
-              <p:tags r:id="rId16"/>
+              <p:tags r:id="rId17"/>
             </p:custDataLst>
           </p:nvPr>
         </p:nvSpPr>
@@ -12423,7 +13015,7 @@
           <p:nvPr>
             <p:ph type="dt" sz="half" idx="2"/>
             <p:custDataLst>
-              <p:tags r:id="rId17"/>
+              <p:tags r:id="rId18"/>
             </p:custDataLst>
           </p:nvPr>
         </p:nvSpPr>
@@ -12468,7 +13060,7 @@
           <p:nvPr>
             <p:ph type="ftr" sz="quarter" idx="3"/>
             <p:custDataLst>
-              <p:tags r:id="rId18"/>
+              <p:tags r:id="rId19"/>
             </p:custDataLst>
           </p:nvPr>
         </p:nvSpPr>
@@ -12510,7 +13102,7 @@
           <p:nvPr>
             <p:ph type="sldNum" sz="quarter" idx="4"/>
             <p:custDataLst>
-              <p:tags r:id="rId19"/>
+              <p:tags r:id="rId20"/>
             </p:custDataLst>
           </p:nvPr>
         </p:nvSpPr>
@@ -12548,7 +13140,7 @@
       </p:sp>
     </p:spTree>
     <p:custDataLst>
-      <p:tags r:id="rId20"/>
+      <p:tags r:id="rId21"/>
     </p:custDataLst>
   </p:cSld>
   <p:clrMap bg1="lt1" tx1="dk1" bg2="lt2" tx2="dk2" accent1="accent1" accent2="accent2" accent3="accent3" accent4="accent4" accent5="accent5" accent6="accent6" hlink="hlink" folHlink="folHlink"/>
@@ -12567,6 +13159,7 @@
     <p:sldLayoutId id="2147483660" r:id="rId12"/>
     <p:sldLayoutId id="2147483661" r:id="rId13"/>
     <p:sldLayoutId id="2147483662" r:id="rId14"/>
+    <p:sldLayoutId id="2147483663" r:id="rId15"/>
   </p:sldLayoutIdLst>
   <p:txStyles>
     <p:titleStyle>
@@ -14738,7 +15331,7 @@
       </p:sp>
       <p:sp>
         <p:nvSpPr>
-          <p:cNvPr id="1" name="文本框 0"/>
+          <p:cNvPr id="2" name="文本框 1"/>
           <p:cNvSpPr txBox="1"/>
           <p:nvPr/>
         </p:nvSpPr>
@@ -15541,7 +16134,7 @@
       </p:sp>
       <p:sp>
         <p:nvSpPr>
-          <p:cNvPr id="1" name="文本框 0"/>
+          <p:cNvPr id="2" name="文本框 1"/>
           <p:cNvSpPr txBox="1"/>
           <p:nvPr/>
         </p:nvSpPr>
@@ -15720,7 +16313,7 @@
       </p:sp>
       <p:sp>
         <p:nvSpPr>
-          <p:cNvPr id="1" name="文本框 5"/>
+          <p:cNvPr id="2" name="文本框 5"/>
           <p:cNvSpPr txBox="1"/>
           <p:nvPr/>
         </p:nvSpPr>
@@ -16554,7 +17147,7 @@
       </p:sp>
       <p:sp>
         <p:nvSpPr>
-          <p:cNvPr id="1" name="文本框 5"/>
+          <p:cNvPr id="2" name="文本框 5"/>
           <p:cNvSpPr txBox="1"/>
           <p:nvPr/>
         </p:nvSpPr>
@@ -17486,7 +18079,7 @@
   <p:cSld>
     <p:spTree>
       <p:nvGrpSpPr>
-        <p:cNvPr id="87" name=""/>
+        <p:cNvPr id="1" name=""/>
         <p:cNvGrpSpPr/>
         <p:nvPr/>
       </p:nvGrpSpPr>
@@ -17500,7 +18093,7 @@
       </p:grpSpPr>
       <p:sp>
         <p:nvSpPr>
-          <p:cNvPr id="88" name="标题 1"/>
+          <p:cNvPr id="3" name="标题 2"/>
           <p:cNvSpPr>
             <a:spLocks noGrp="1"/>
           </p:cNvSpPr>
@@ -17510,8 +18103,8 @@
         </p:nvSpPr>
         <p:spPr>
           <a:xfrm>
-            <a:off x="565150" y="339090"/>
-            <a:ext cx="10309225" cy="612775"/>
+            <a:off x="5055235" y="2493010"/>
+            <a:ext cx="2254250" cy="615315"/>
           </a:xfrm>
         </p:spPr>
         <p:txBody>
@@ -17521,493 +18114,15 @@
           <a:lstStyle/>
           <a:p>
             <a:r>
-              <a:rPr lang="zh-CN" altLang="en-US" b="1" dirty="0">
-                <a:latin typeface="微软雅黑" panose="020B0503020204020204" charset="-122"/>
-                <a:ea typeface="微软雅黑" panose="020B0503020204020204" charset="-122"/>
-              </a:rPr>
-              <a:t>调研总结</a:t>
-            </a:r>
-            <a:endParaRPr lang="zh-CN" altLang="en-US" b="1" dirty="0">
+              <a:rPr lang="zh-CN" altLang="en-US" sz="5400" dirty="0">
+                <a:latin typeface="微软雅黑" panose="020B0503020204020204" charset="-122"/>
+                <a:ea typeface="微软雅黑" panose="020B0503020204020204" charset="-122"/>
+              </a:rPr>
+              <a:t>谢谢！</a:t>
+            </a:r>
+            <a:endParaRPr lang="zh-CN" altLang="en-US" sz="5400" dirty="0">
               <a:latin typeface="微软雅黑" panose="020B0503020204020204" charset="-122"/>
               <a:ea typeface="微软雅黑" panose="020B0503020204020204" charset="-122"/>
-            </a:endParaRPr>
-          </a:p>
-        </p:txBody>
-      </p:sp>
-      <p:sp>
-        <p:nvSpPr>
-          <p:cNvPr id="90" name="文本框 1"/>
-          <p:cNvSpPr txBox="1"/>
-          <p:nvPr/>
-        </p:nvSpPr>
-        <p:spPr>
-          <a:xfrm>
-            <a:off x="363855" y="1139825"/>
-            <a:ext cx="11370945" cy="5247640"/>
-          </a:xfrm>
-          <a:prstGeom prst="rect">
-            <a:avLst/>
-          </a:prstGeom>
-          <a:noFill/>
-        </p:spPr>
-        <p:txBody>
-          <a:bodyPr wrap="square" rtlCol="0" anchor="t">
-            <a:noAutofit/>
-          </a:bodyPr>
-          <a:p>
-            <a:pPr>
-              <a:lnSpc>
-                <a:spcPct val="150000"/>
-              </a:lnSpc>
-            </a:pPr>
-            <a:r>
-              <a:rPr lang="zh-CN" altLang="en-US" sz="1600" dirty="0">
-                <a:latin typeface="微软雅黑" panose="020B0503020204020204" charset="-122"/>
-                <a:ea typeface="微软雅黑" panose="020B0503020204020204" charset="-122"/>
-                <a:sym typeface="+mn-ea"/>
-              </a:rPr>
-              <a:t>本次调研表明，</a:t>
-            </a:r>
-            <a:r>
-              <a:rPr lang="en-US" altLang="zh-CN" sz="1600" dirty="0">
-                <a:latin typeface="微软雅黑" panose="020B0503020204020204" charset="-122"/>
-                <a:ea typeface="微软雅黑" panose="020B0503020204020204" charset="-122"/>
-                <a:sym typeface="+mn-ea"/>
-              </a:rPr>
-              <a:t>AI</a:t>
-            </a:r>
-            <a:r>
-              <a:rPr lang="zh-CN" altLang="en-US" sz="1600" dirty="0">
-                <a:latin typeface="微软雅黑" panose="020B0503020204020204" charset="-122"/>
-                <a:ea typeface="微软雅黑" panose="020B0503020204020204" charset="-122"/>
-                <a:sym typeface="+mn-ea"/>
-              </a:rPr>
-              <a:t>与通信的结合正在出现四个较为明确的变化。</a:t>
-            </a:r>
-            <a:endParaRPr lang="en-US" altLang="zh-CN" sz="1600" dirty="0">
-              <a:latin typeface="微软雅黑" panose="020B0503020204020204" charset="-122"/>
-              <a:ea typeface="微软雅黑" panose="020B0503020204020204" charset="-122"/>
-              <a:sym typeface="+mn-ea"/>
-            </a:endParaRPr>
-          </a:p>
-          <a:p>
-            <a:pPr>
-              <a:lnSpc>
-                <a:spcPct val="150000"/>
-              </a:lnSpc>
-            </a:pPr>
-            <a:r>
-              <a:rPr lang="zh-CN" altLang="en-US" sz="1600" b="1" dirty="0">
-                <a:latin typeface="微软雅黑" panose="020B0503020204020204" charset="-122"/>
-                <a:ea typeface="微软雅黑" panose="020B0503020204020204" charset="-122"/>
-                <a:sym typeface="+mn-ea"/>
-              </a:rPr>
-              <a:t>1. 网络测量从“周期采集”走向“预测与事件驱动”</a:t>
-            </a:r>
-            <a:endParaRPr lang="en-US" altLang="zh-CN" sz="1600" b="1" dirty="0">
-              <a:latin typeface="微软雅黑" panose="020B0503020204020204" charset="-122"/>
-              <a:ea typeface="微软雅黑" panose="020B0503020204020204" charset="-122"/>
-              <a:sym typeface="+mn-ea"/>
-            </a:endParaRPr>
-          </a:p>
-          <a:p>
-            <a:pPr>
-              <a:lnSpc>
-                <a:spcPct val="150000"/>
-              </a:lnSpc>
-            </a:pPr>
-            <a:r>
-              <a:rPr lang="zh-CN" altLang="en-US" sz="1600" dirty="0">
-                <a:latin typeface="微软雅黑" panose="020B0503020204020204" charset="-122"/>
-                <a:ea typeface="微软雅黑" panose="020B0503020204020204" charset="-122"/>
-                <a:sym typeface="+mn-ea"/>
-              </a:rPr>
-              <a:t>高铁移动性预测和关键事件驱动的</a:t>
-            </a:r>
-            <a:r>
-              <a:rPr lang="en-US" altLang="zh-CN" sz="1600" dirty="0">
-                <a:latin typeface="微软雅黑" panose="020B0503020204020204" charset="-122"/>
-                <a:ea typeface="微软雅黑" panose="020B0503020204020204" charset="-122"/>
-                <a:sym typeface="+mn-ea"/>
-              </a:rPr>
-              <a:t>UE</a:t>
-            </a:r>
-            <a:r>
-              <a:rPr lang="zh-CN" altLang="en-US" sz="1600" dirty="0">
-                <a:latin typeface="微软雅黑" panose="020B0503020204020204" charset="-122"/>
-                <a:ea typeface="微软雅黑" panose="020B0503020204020204" charset="-122"/>
-                <a:sym typeface="+mn-ea"/>
-              </a:rPr>
-              <a:t>数据采集表明，网络测量开始关注减少无效测量、提前识别风险以及采集高价值数据。</a:t>
-            </a:r>
-            <a:endParaRPr lang="en-US" altLang="zh-CN" sz="1600" dirty="0">
-              <a:latin typeface="微软雅黑" panose="020B0503020204020204" charset="-122"/>
-              <a:ea typeface="微软雅黑" panose="020B0503020204020204" charset="-122"/>
-              <a:sym typeface="+mn-ea"/>
-            </a:endParaRPr>
-          </a:p>
-          <a:p>
-            <a:pPr>
-              <a:lnSpc>
-                <a:spcPct val="150000"/>
-              </a:lnSpc>
-            </a:pPr>
-            <a:r>
-              <a:rPr lang="zh-CN" altLang="en-US" sz="1600" b="1" dirty="0">
-                <a:latin typeface="微软雅黑" panose="020B0503020204020204" charset="-122"/>
-                <a:ea typeface="微软雅黑" panose="020B0503020204020204" charset="-122"/>
-                <a:sym typeface="+mn-ea"/>
-              </a:rPr>
-              <a:t>2. 网络分析从“</a:t>
-            </a:r>
-            <a:r>
-              <a:rPr lang="en-US" altLang="zh-CN" sz="1600" b="1" dirty="0">
-                <a:latin typeface="微软雅黑" panose="020B0503020204020204" charset="-122"/>
-                <a:ea typeface="微软雅黑" panose="020B0503020204020204" charset="-122"/>
-                <a:sym typeface="+mn-ea"/>
-              </a:rPr>
-              <a:t>KPI</a:t>
-            </a:r>
-            <a:r>
-              <a:rPr lang="zh-CN" altLang="en-US" sz="1600" b="1" dirty="0">
-                <a:latin typeface="微软雅黑" panose="020B0503020204020204" charset="-122"/>
-                <a:ea typeface="微软雅黑" panose="020B0503020204020204" charset="-122"/>
-                <a:sym typeface="+mn-ea"/>
-              </a:rPr>
-              <a:t>监控”走向“业务体验与异常理解”</a:t>
-            </a:r>
-            <a:endParaRPr lang="en-US" altLang="zh-CN" sz="1600" b="1" dirty="0">
-              <a:latin typeface="微软雅黑" panose="020B0503020204020204" charset="-122"/>
-              <a:ea typeface="微软雅黑" panose="020B0503020204020204" charset="-122"/>
-              <a:sym typeface="+mn-ea"/>
-            </a:endParaRPr>
-          </a:p>
-          <a:p>
-            <a:pPr>
-              <a:lnSpc>
-                <a:spcPct val="150000"/>
-              </a:lnSpc>
-            </a:pPr>
-            <a:r>
-              <a:rPr lang="en-US" altLang="zh-CN" sz="1600" dirty="0">
-                <a:latin typeface="微软雅黑" panose="020B0503020204020204" charset="-122"/>
-                <a:ea typeface="微软雅黑" panose="020B0503020204020204" charset="-122"/>
-                <a:sym typeface="+mn-ea"/>
-              </a:rPr>
-              <a:t>RIC</a:t>
-            </a:r>
-            <a:r>
-              <a:rPr lang="zh-CN" altLang="en-US" sz="1600" dirty="0">
-                <a:latin typeface="微软雅黑" panose="020B0503020204020204" charset="-122"/>
-                <a:ea typeface="微软雅黑" panose="020B0503020204020204" charset="-122"/>
-                <a:sym typeface="+mn-ea"/>
-              </a:rPr>
-              <a:t>视频</a:t>
-            </a:r>
-            <a:r>
-              <a:rPr lang="en-US" altLang="zh-CN" sz="1600" dirty="0">
-                <a:latin typeface="微软雅黑" panose="020B0503020204020204" charset="-122"/>
-                <a:ea typeface="微软雅黑" panose="020B0503020204020204" charset="-122"/>
-                <a:sym typeface="+mn-ea"/>
-              </a:rPr>
-              <a:t>QoE、RANGAN</a:t>
-            </a:r>
-            <a:r>
-              <a:rPr lang="zh-CN" altLang="en-US" sz="1600" dirty="0">
-                <a:latin typeface="微软雅黑" panose="020B0503020204020204" charset="-122"/>
-                <a:ea typeface="微软雅黑" panose="020B0503020204020204" charset="-122"/>
-                <a:sym typeface="+mn-ea"/>
-              </a:rPr>
-              <a:t>和播放卡顿预期上报等研究，正在打通无线</a:t>
-            </a:r>
-            <a:r>
-              <a:rPr lang="en-US" altLang="zh-CN" sz="1600" dirty="0">
-                <a:latin typeface="微软雅黑" panose="020B0503020204020204" charset="-122"/>
-                <a:ea typeface="微软雅黑" panose="020B0503020204020204" charset="-122"/>
-                <a:sym typeface="+mn-ea"/>
-              </a:rPr>
-              <a:t>KPI、</a:t>
-            </a:r>
-            <a:r>
-              <a:rPr lang="zh-CN" altLang="en-US" sz="1600" dirty="0">
-                <a:latin typeface="微软雅黑" panose="020B0503020204020204" charset="-122"/>
-                <a:ea typeface="微软雅黑" panose="020B0503020204020204" charset="-122"/>
-                <a:sym typeface="+mn-ea"/>
-              </a:rPr>
-              <a:t>终端状态和用户体验之间的关系，使网络能够更主动地识别业务质量下降及其原因。</a:t>
-            </a:r>
-            <a:endParaRPr lang="en-US" altLang="zh-CN" sz="1600" dirty="0">
-              <a:latin typeface="微软雅黑" panose="020B0503020204020204" charset="-122"/>
-              <a:ea typeface="微软雅黑" panose="020B0503020204020204" charset="-122"/>
-              <a:sym typeface="+mn-ea"/>
-            </a:endParaRPr>
-          </a:p>
-          <a:p>
-            <a:pPr>
-              <a:lnSpc>
-                <a:spcPct val="150000"/>
-              </a:lnSpc>
-            </a:pPr>
-            <a:r>
-              <a:rPr lang="zh-CN" altLang="en-US" sz="1600" b="1" dirty="0">
-                <a:latin typeface="微软雅黑" panose="020B0503020204020204" charset="-122"/>
-                <a:ea typeface="微软雅黑" panose="020B0503020204020204" charset="-122"/>
-                <a:sym typeface="+mn-ea"/>
-              </a:rPr>
-              <a:t>3. 网络控制从“性能优化”走向“安全可靠的闭环决策”</a:t>
-            </a:r>
-            <a:endParaRPr lang="zh-CN" altLang="en-US" sz="1600" b="1" dirty="0">
-              <a:latin typeface="微软雅黑" panose="020B0503020204020204" charset="-122"/>
-              <a:ea typeface="微软雅黑" panose="020B0503020204020204" charset="-122"/>
-              <a:sym typeface="+mn-ea"/>
-            </a:endParaRPr>
-          </a:p>
-          <a:p>
-            <a:pPr>
-              <a:lnSpc>
-                <a:spcPct val="150000"/>
-              </a:lnSpc>
-            </a:pPr>
-            <a:r>
-              <a:rPr lang="en-US" altLang="zh-CN" sz="1600" dirty="0">
-                <a:latin typeface="微软雅黑" panose="020B0503020204020204" charset="-122"/>
-                <a:ea typeface="微软雅黑" panose="020B0503020204020204" charset="-122"/>
-                <a:sym typeface="+mn-ea"/>
-              </a:rPr>
-              <a:t>xSlice</a:t>
-            </a:r>
-            <a:r>
-              <a:rPr lang="zh-CN" altLang="en-US" sz="1600" dirty="0">
-                <a:latin typeface="微软雅黑" panose="020B0503020204020204" charset="-122"/>
-                <a:ea typeface="微软雅黑" panose="020B0503020204020204" charset="-122"/>
-                <a:sym typeface="+mn-ea"/>
-              </a:rPr>
-              <a:t>展示了强化学习接入真实</a:t>
-            </a:r>
-            <a:r>
-              <a:rPr lang="en-US" altLang="zh-CN" sz="1600" dirty="0">
-                <a:latin typeface="微软雅黑" panose="020B0503020204020204" charset="-122"/>
-                <a:ea typeface="微软雅黑" panose="020B0503020204020204" charset="-122"/>
-                <a:sym typeface="+mn-ea"/>
-              </a:rPr>
-              <a:t>RIC</a:t>
-            </a:r>
-            <a:r>
-              <a:rPr lang="zh-CN" altLang="en-US" sz="1600" dirty="0">
-                <a:latin typeface="微软雅黑" panose="020B0503020204020204" charset="-122"/>
-                <a:ea typeface="微软雅黑" panose="020B0503020204020204" charset="-122"/>
-                <a:sym typeface="+mn-ea"/>
-              </a:rPr>
-              <a:t>闭环的可行性；</a:t>
-            </a:r>
-            <a:r>
-              <a:rPr lang="en-US" altLang="zh-CN" sz="1600" dirty="0">
-                <a:latin typeface="微软雅黑" panose="020B0503020204020204" charset="-122"/>
-                <a:ea typeface="微软雅黑" panose="020B0503020204020204" charset="-122"/>
-                <a:sym typeface="+mn-ea"/>
-              </a:rPr>
-              <a:t>SafeSlice</a:t>
-            </a:r>
-            <a:r>
-              <a:rPr lang="zh-CN" altLang="en-US" sz="1600" dirty="0">
-                <a:latin typeface="微软雅黑" panose="020B0503020204020204" charset="-122"/>
-                <a:ea typeface="微软雅黑" panose="020B0503020204020204" charset="-122"/>
-                <a:sym typeface="+mn-ea"/>
-              </a:rPr>
-              <a:t>和预测质量专利则表明，通信控制不仅要提升性能，还需要考虑</a:t>
-            </a:r>
-            <a:r>
-              <a:rPr lang="en-US" altLang="zh-CN" sz="1600" dirty="0">
-                <a:latin typeface="微软雅黑" panose="020B0503020204020204" charset="-122"/>
-                <a:ea typeface="微软雅黑" panose="020B0503020204020204" charset="-122"/>
-                <a:sym typeface="+mn-ea"/>
-              </a:rPr>
-              <a:t>SLA</a:t>
-            </a:r>
-            <a:r>
-              <a:rPr lang="zh-CN" altLang="en-US" sz="1600" dirty="0">
-                <a:latin typeface="微软雅黑" panose="020B0503020204020204" charset="-122"/>
-                <a:ea typeface="微软雅黑" panose="020B0503020204020204" charset="-122"/>
-                <a:sym typeface="+mn-ea"/>
-              </a:rPr>
-              <a:t>约束、动作安全和预测结果的可靠性。</a:t>
-            </a:r>
-            <a:endParaRPr lang="en-US" altLang="zh-CN" sz="1600" dirty="0">
-              <a:latin typeface="微软雅黑" panose="020B0503020204020204" charset="-122"/>
-              <a:ea typeface="微软雅黑" panose="020B0503020204020204" charset="-122"/>
-              <a:sym typeface="+mn-ea"/>
-            </a:endParaRPr>
-          </a:p>
-          <a:p>
-            <a:pPr>
-              <a:lnSpc>
-                <a:spcPct val="150000"/>
-              </a:lnSpc>
-            </a:pPr>
-            <a:r>
-              <a:rPr lang="en-US" altLang="zh-CN" sz="1600" b="1" dirty="0">
-                <a:latin typeface="微软雅黑" panose="020B0503020204020204" charset="-122"/>
-                <a:ea typeface="微软雅黑" panose="020B0503020204020204" charset="-122"/>
-                <a:sym typeface="+mn-ea"/>
-              </a:rPr>
-              <a:t>4. AI</a:t>
-            </a:r>
-            <a:r>
-              <a:rPr lang="zh-CN" altLang="en-US" sz="1600" b="1" dirty="0">
-                <a:latin typeface="微软雅黑" panose="020B0503020204020204" charset="-122"/>
-                <a:ea typeface="微软雅黑" panose="020B0503020204020204" charset="-122"/>
-                <a:sym typeface="+mn-ea"/>
-              </a:rPr>
-              <a:t>应用从地面网络扩展到无线环境、卫星与数字孪生</a:t>
-            </a:r>
-            <a:endParaRPr lang="en-US" altLang="zh-CN" sz="1600" dirty="0">
-              <a:latin typeface="微软雅黑" panose="020B0503020204020204" charset="-122"/>
-              <a:ea typeface="微软雅黑" panose="020B0503020204020204" charset="-122"/>
-              <a:sym typeface="+mn-ea"/>
-            </a:endParaRPr>
-          </a:p>
-          <a:p>
-            <a:pPr>
-              <a:lnSpc>
-                <a:spcPct val="150000"/>
-              </a:lnSpc>
-            </a:pPr>
-            <a:r>
-              <a:rPr lang="en-US" altLang="zh-CN" sz="1600" dirty="0">
-                <a:latin typeface="微软雅黑" panose="020B0503020204020204" charset="-122"/>
-                <a:ea typeface="微软雅黑" panose="020B0503020204020204" charset="-122"/>
-                <a:sym typeface="+mn-ea"/>
-              </a:rPr>
-              <a:t>PropSplat</a:t>
-            </a:r>
-            <a:r>
-              <a:rPr lang="zh-CN" altLang="en-US" sz="1600" dirty="0">
-                <a:latin typeface="微软雅黑" panose="020B0503020204020204" charset="-122"/>
-                <a:ea typeface="微软雅黑" panose="020B0503020204020204" charset="-122"/>
-                <a:sym typeface="+mn-ea"/>
-              </a:rPr>
-              <a:t>和</a:t>
-            </a:r>
-            <a:r>
-              <a:rPr lang="en-US" altLang="zh-CN" sz="1600" dirty="0">
-                <a:latin typeface="微软雅黑" panose="020B0503020204020204" charset="-122"/>
-                <a:ea typeface="微软雅黑" panose="020B0503020204020204" charset="-122"/>
-                <a:sym typeface="+mn-ea"/>
-              </a:rPr>
-              <a:t>Radio Map</a:t>
-            </a:r>
-            <a:r>
-              <a:rPr lang="zh-CN" altLang="en-US" sz="1600" dirty="0">
-                <a:latin typeface="微软雅黑" panose="020B0503020204020204" charset="-122"/>
-                <a:ea typeface="微软雅黑" panose="020B0503020204020204" charset="-122"/>
-                <a:sym typeface="+mn-ea"/>
-              </a:rPr>
-              <a:t>在线适配分别研究无线环境模型的低成本构建与动态更新；</a:t>
-            </a:r>
-            <a:r>
-              <a:rPr lang="en-US" altLang="zh-CN" sz="1600" dirty="0">
-                <a:latin typeface="微软雅黑" panose="020B0503020204020204" charset="-122"/>
-                <a:ea typeface="微软雅黑" panose="020B0503020204020204" charset="-122"/>
-                <a:sym typeface="+mn-ea"/>
-              </a:rPr>
-              <a:t>Joint LEO</a:t>
-            </a:r>
-            <a:r>
-              <a:rPr lang="zh-CN" altLang="en-US" sz="1600" dirty="0">
-                <a:latin typeface="微软雅黑" panose="020B0503020204020204" charset="-122"/>
-                <a:ea typeface="微软雅黑" panose="020B0503020204020204" charset="-122"/>
-                <a:sym typeface="+mn-ea"/>
-              </a:rPr>
-              <a:t>和</a:t>
-            </a:r>
-            <a:r>
-              <a:rPr lang="en-US" altLang="zh-CN" sz="1600" dirty="0">
-                <a:latin typeface="微软雅黑" panose="020B0503020204020204" charset="-122"/>
-                <a:ea typeface="微软雅黑" panose="020B0503020204020204" charset="-122"/>
-                <a:sym typeface="+mn-ea"/>
-              </a:rPr>
-              <a:t>LF-GNSS</a:t>
-            </a:r>
-            <a:r>
-              <a:rPr lang="zh-CN" altLang="en-US" sz="1600" dirty="0">
-                <a:latin typeface="微软雅黑" panose="020B0503020204020204" charset="-122"/>
-                <a:ea typeface="微软雅黑" panose="020B0503020204020204" charset="-122"/>
-                <a:sym typeface="+mn-ea"/>
-              </a:rPr>
-              <a:t>将</a:t>
-            </a:r>
-            <a:r>
-              <a:rPr lang="en-US" altLang="zh-CN" sz="1600" dirty="0">
-                <a:latin typeface="微软雅黑" panose="020B0503020204020204" charset="-122"/>
-                <a:ea typeface="微软雅黑" panose="020B0503020204020204" charset="-122"/>
-                <a:sym typeface="+mn-ea"/>
-              </a:rPr>
-              <a:t>AI</a:t>
-            </a:r>
-            <a:r>
-              <a:rPr lang="zh-CN" altLang="en-US" sz="1600" dirty="0">
-                <a:latin typeface="微软雅黑" panose="020B0503020204020204" charset="-122"/>
-                <a:ea typeface="微软雅黑" panose="020B0503020204020204" charset="-122"/>
-                <a:sym typeface="+mn-ea"/>
-              </a:rPr>
-              <a:t>扩展到卫星通信与定位；数字孪生进一步用于网络模型自动生成和候选配置效果预测。</a:t>
-            </a:r>
-            <a:endParaRPr lang="en-US" altLang="zh-CN" sz="1600" dirty="0">
-              <a:latin typeface="微软雅黑" panose="020B0503020204020204" charset="-122"/>
-              <a:ea typeface="微软雅黑" panose="020B0503020204020204" charset="-122"/>
-              <a:sym typeface="+mn-ea"/>
-            </a:endParaRPr>
-          </a:p>
-          <a:p>
-            <a:pPr>
-              <a:lnSpc>
-                <a:spcPct val="150000"/>
-              </a:lnSpc>
-            </a:pPr>
-            <a:r>
-              <a:rPr lang="zh-CN" altLang="en-US" sz="1600" dirty="0">
-                <a:latin typeface="微软雅黑" panose="020B0503020204020204" charset="-122"/>
-                <a:ea typeface="微软雅黑" panose="020B0503020204020204" charset="-122"/>
-                <a:sym typeface="+mn-ea"/>
-              </a:rPr>
-              <a:t>总体来看，</a:t>
-            </a:r>
-            <a:r>
-              <a:rPr lang="en-US" altLang="zh-CN" sz="1600" dirty="0">
-                <a:latin typeface="微软雅黑" panose="020B0503020204020204" charset="-122"/>
-                <a:ea typeface="微软雅黑" panose="020B0503020204020204" charset="-122"/>
-                <a:sym typeface="+mn-ea"/>
-              </a:rPr>
-              <a:t>AI</a:t>
-            </a:r>
-            <a:r>
-              <a:rPr lang="zh-CN" altLang="en-US" sz="1600" dirty="0">
-                <a:latin typeface="微软雅黑" panose="020B0503020204020204" charset="-122"/>
-                <a:ea typeface="微软雅黑" panose="020B0503020204020204" charset="-122"/>
-                <a:sym typeface="+mn-ea"/>
-              </a:rPr>
-              <a:t>正在推动通信系统由固定测量、被动分析和单点优化，逐步转向</a:t>
-            </a:r>
-            <a:r>
-              <a:rPr lang="zh-CN" altLang="en-US" sz="1600" b="1" dirty="0">
-                <a:latin typeface="微软雅黑" panose="020B0503020204020204" charset="-122"/>
-                <a:ea typeface="微软雅黑" panose="020B0503020204020204" charset="-122"/>
-                <a:sym typeface="+mn-ea"/>
-              </a:rPr>
-              <a:t>按需感知、业务理解与安全闭环决策</a:t>
-            </a:r>
-            <a:r>
-              <a:rPr lang="zh-CN" altLang="en-US" sz="1600" dirty="0">
-                <a:latin typeface="微软雅黑" panose="020B0503020204020204" charset="-122"/>
-                <a:ea typeface="微软雅黑" panose="020B0503020204020204" charset="-122"/>
-                <a:sym typeface="+mn-ea"/>
-              </a:rPr>
-              <a:t>。</a:t>
-            </a:r>
-            <a:endParaRPr lang="zh-CN" altLang="en-US" sz="1600" dirty="0">
-              <a:latin typeface="微软雅黑" panose="020B0503020204020204" charset="-122"/>
-              <a:ea typeface="微软雅黑" panose="020B0503020204020204" charset="-122"/>
-              <a:sym typeface="+mn-ea"/>
             </a:endParaRPr>
           </a:p>
         </p:txBody>
@@ -18490,7 +18605,7 @@
       </p:sp>
       <p:sp>
         <p:nvSpPr>
-          <p:cNvPr id="1" name="文本框 5"/>
+          <p:cNvPr id="2" name="文本框 5"/>
           <p:cNvSpPr txBox="1"/>
           <p:nvPr/>
         </p:nvSpPr>
@@ -19259,7 +19374,7 @@
       </p:sp>
       <p:sp>
         <p:nvSpPr>
-          <p:cNvPr id="1" name="文本框 5"/>
+          <p:cNvPr id="2" name="文本框 5"/>
           <p:cNvSpPr txBox="1"/>
           <p:nvPr/>
         </p:nvSpPr>
@@ -20315,7 +20430,7 @@
       </p:sp>
       <p:sp>
         <p:nvSpPr>
-          <p:cNvPr id="1" name="文本框 5"/>
+          <p:cNvPr id="3" name="文本框 5"/>
           <p:cNvSpPr txBox="1"/>
           <p:nvPr/>
         </p:nvSpPr>
@@ -21173,7 +21288,7 @@
       </p:sp>
       <p:sp>
         <p:nvSpPr>
-          <p:cNvPr id="1" name="文本框 5"/>
+          <p:cNvPr id="2" name="文本框 5"/>
           <p:cNvSpPr txBox="1"/>
           <p:nvPr/>
         </p:nvSpPr>
